--- a/Rapid Cortex Internal Docs/Sales_Marketing/Pitch Decks/RapidCortex_PitchDeck06-26.pptx
+++ b/Rapid Cortex Internal Docs/Sales_Marketing/Pitch Decks/RapidCortex_PitchDeck06-26.pptx
@@ -1954,7 +1954,7 @@
                 <a:ea typeface="Arial" pitchFamily="34" charset="-122"/>
                 <a:cs typeface="Arial" pitchFamily="34" charset="-120"/>
               </a:rPr>
-              <a:t>RAPID CORTEX</a:t>
+              <a:t>NEXCORT IQ</a:t>
             </a:r>
             <a:endParaRPr lang="en-US" sz="4400" dirty="0">
               <a:gradFill flip="none" rotWithShape="1">
@@ -2008,7 +2008,7 @@
                 <a:latin typeface="Arial" panose="020B0604020202020204" pitchFamily="34" charset="0"/>
                 <a:cs typeface="Arial" panose="020B0604020202020204" pitchFamily="34" charset="0"/>
               </a:rPr>
-              <a:t>WHAT CHANGES WHEN RAPID CORTEX ENTERS THE 9-1-1 CENTER?</a:t>
+              <a:t>WHAT CHANGES WHEN NEXCORT IQ ENTERS THE 9-1-1 CENTER?</a:t>
             </a:r>
           </a:p>
         </p:txBody>
@@ -2696,7 +2696,7 @@
                 <a:ea typeface="Arial" pitchFamily="34" charset="-122"/>
                 <a:cs typeface="Arial" pitchFamily="34" charset="-120"/>
               </a:rPr>
-              <a:t>Rapid Cortex is ready to partner with forward-thinking agencies</a:t>
+              <a:t>NexCort iQ is ready to partner with forward-thinking agencies</a:t>
             </a:r>
             <a:endParaRPr lang="en-US" sz="1350" dirty="0"/>
           </a:p>
@@ -4131,7 +4131,7 @@
                 <a:ea typeface="Arial" pitchFamily="34" charset="-122"/>
                 <a:cs typeface="Arial" pitchFamily="34" charset="-120"/>
               </a:rPr>
-              <a:t>Rapid Cortex doesn't replace dispatchers.</a:t>
+              <a:t>NexCort iQ doesn't replace dispatchers.</a:t>
             </a:r>
             <a:endParaRPr lang="en-US" sz="1200" dirty="0"/>
           </a:p>
@@ -4928,7 +4928,7 @@
                 <a:ea typeface="Arial" pitchFamily="34" charset="-122"/>
                 <a:cs typeface="Arial" pitchFamily="34" charset="-120"/>
               </a:rPr>
-              <a:t>RAPID CORTEX</a:t>
+              <a:t>NEXCORT IQ</a:t>
             </a:r>
             <a:endParaRPr lang="en-US" sz="5800" dirty="0"/>
           </a:p>
@@ -7049,7 +7049,7 @@
                 <a:ea typeface="Arial" pitchFamily="34" charset="-122"/>
                 <a:cs typeface="Arial" pitchFamily="34" charset="-120"/>
               </a:rPr>
-              <a:t>Rapid Cortex enhances your existing CAD system, telephony, and workflows — without replacing anything your team already relies on.</a:t>
+              <a:t>NexCort iQ enhances your existing CAD system, telephony, and workflows — without replacing anything your team already relies on.</a:t>
             </a:r>
             <a:endParaRPr lang="en-US" sz="1150" dirty="0"/>
           </a:p>
@@ -8035,7 +8035,7 @@
                 <a:ea typeface="Arial" pitchFamily="34" charset="-122"/>
                 <a:cs typeface="Arial" pitchFamily="34" charset="-120"/>
               </a:rPr>
-              <a:t>Rapid Cortex is built with CJIS-aware principles from day one.</a:t>
+              <a:t>NexCort iQ is built with CJIS-aware principles from day one.</a:t>
             </a:r>
             <a:endParaRPr lang="en-US" sz="1200" dirty="0"/>
           </a:p>
@@ -8742,7 +8742,7 @@
                 <a:ea typeface="Arial" pitchFamily="34" charset="-122"/>
                 <a:cs typeface="Arial" pitchFamily="34" charset="-120"/>
               </a:rPr>
-              <a:t>Rapid Cortex deploys on AWS with multi-region capability, 99.9% SLA,</a:t>
+              <a:t>NexCort iQ deploys on AWS with multi-region capability, 99.9% SLA,</a:t>
             </a:r>
             <a:endParaRPr lang="en-US" sz="1300" dirty="0"/>
           </a:p>
